--- a/materials/week9/w9-slides.pptx
+++ b/materials/week9/w9-slides.pptx
@@ -620,7 +620,7 @@
           <a:lstStyle/>
           <a:p>
             <a:r>
-              <a:t>ไล่ทีละกล่อง — "กล่องแรกคืองานสัปดาห์ที่ 6 กล่องสองคือสัปดาห์ที่ 7 กล่องสามคือสัปดาห์ที่ 8" · บอกว่านี่คือการเอา 3 สัปดาห์มาอัดในรอบเดียว และนั่นคือเหตุผลที่ต้องแบ่งงาน</a:t>
+              <a:t>ไล่ทีละกล่อง — "กล่องแรกคืองานสัปดาห์ที่ 6 กล่องสองคือสัปดาห์ที่ 7 กล่องสามคือสัปดาห์ที่ 8" · ย้ำว่าเราไม่ได้ตั้งชื่อผู้ช่วยเอง เดี๋ยวให้ AI เสนอมาว่าควรแบ่งกี่ตัว เราแค่รู้ว่างานมีสามก้อนนี้ จะได้ตรวจแผนที่มันเสนอเป็น · บอกว่านี่คือการเอา 3 สัปดาห์มาอัดในรอบเดียว และนั่นคือเหตุผลที่ต้องแบ่งงาน</a:t>
             </a:r>
           </a:p>
         </p:txBody>
@@ -760,7 +760,7 @@
           <a:lstStyle/>
           <a:p>
             <a:r>
-              <a:t>อธิบายว่าทำไม prompt นี้ยาวได้ — เพราะเป็นรายการหน้าที่และชื่อโมเดล ไม่ใช่การสั่งหลายงานพร้อมกัน · ย้ำบรรทัดสุดท้าย "ให้ผมอ่านไฟล์ก่อน" คือจังหวะที่ 3 ของเราที่ห้ามข้าม</a:t>
+              <a:t>ย้ำว่า prompt สั้นสามบรรทัดเหมือนทุกสัปดาห์ — "ผมไม่ได้สั่งว่าสามตัว ผมถามว่าควรกี่ตัว เพราะมันอ่านสเปคแล้ว มันรู้ว่างานมีกี่ก้อน" · บอกว่าจังหวะถัดไปคือจังหวะที่ 3 ที่เราตรวจ ซึ่งเป็นงานของเราเสมอ</a:t>
             </a:r>
           </a:p>
         </p:txBody>
@@ -830,7 +830,7 @@
           <a:lstStyle/>
           <a:p>
             <a:r>
-              <a:t>ย้ำว่าเราสั่งเป็นภาษาไทยประโยคเดียว แต่สิ่งที่เกิดคือผู้ช่วยสามตัวเดินงานคนละส่วน · บอกให้ห้องสังเกตว่า Claude รายงานกลับมาเป็นช่วง ๆ ไม่ใช่เงียบยาว</a:t>
+              <a:t>นี่คือจังหวะที่ 3 ของวงจร 4 จังหวะ ห้ามข้าม · ถ้ามันเสนอให้ทุกตัวใช้โมเดลเดียวกัน ให้สั่งกลับสั้น ๆ ว่า "งานสร้างหน้าจอใช้โมเดลเล็กพอ" · ครบแล้วค่อยสั่ง "แผนโอเคแล้ว สร้างผู้ช่วยให้เลย" แล้วต่อด้วย **"ให้ผู้ช่วยทุกตัวสร้างระบบตามสเปคให้ครบ เสร็จแต่ละส่วนรายงานผมทีละตัว"</a:t>
             </a:r>
           </a:p>
         </p:txBody>
@@ -7250,7 +7250,7 @@
                 <a:ea typeface="Leelawadee UI"/>
                 <a:cs typeface="Leelawadee UI"/>
               </a:rPr>
-              <a:t>แบ่งงานของสัปดาห์ที่ 6–8 ให้ 3 ผู้ช่วย</a:t>
+              <a:t>งานสัปดาห์ที่ 6–8 แบ่งได้เป็น 3 ก้อน</a:t>
             </a:r>
           </a:p>
         </p:txBody>
@@ -7307,7 +7307,7 @@
                 <a:ea typeface="Leelawadee UI"/>
                 <a:cs typeface="Leelawadee UI"/>
               </a:rPr>
-              <a:t>builder-ui หน้าจอ</a:t>
+              <a:t>หน้าจอทุกหน้า</a:t>
             </a:r>
           </a:p>
         </p:txBody>
@@ -7408,7 +7408,7 @@
                 <a:ea typeface="Leelawadee UI"/>
                 <a:cs typeface="Leelawadee UI"/>
               </a:rPr>
-              <a:t>builder-data ข้อมูล+ล็อกอิน</a:t>
+              <a:t>ข้อมูล + ล็อกอิน</a:t>
             </a:r>
           </a:p>
         </p:txBody>
@@ -7509,7 +7509,7 @@
                 <a:ea typeface="Leelawadee UI"/>
                 <a:cs typeface="Leelawadee UI"/>
               </a:rPr>
-              <a:t>builder-ai ปุ่มผู้ช่วย</a:t>
+              <a:t>ปุ่มผู้ช่วย AI</a:t>
             </a:r>
           </a:p>
         </p:txBody>
@@ -7925,7 +7925,7 @@
                 <a:ea typeface="Leelawadee UI"/>
                 <a:cs typeface="Leelawadee UI"/>
               </a:rPr>
-              <a:t>💬 สั่งสร้างผู้ช่วย 3 ตัว — อันนี้ยาวได้</a:t>
+              <a:t>💬 สั่งสั้น ๆ แล้วให้มันเสนอมา</a:t>
             </a:r>
           </a:p>
         </p:txBody>
@@ -7939,7 +7939,7 @@
         <p:spPr>
           <a:xfrm>
             <a:off x="822960" y="1472184"/>
-            <a:ext cx="10545775" cy="2615184"/>
+            <a:ext cx="10545775" cy="1847088"/>
           </a:xfrm>
           <a:prstGeom prst="roundRect">
             <a:avLst/>
@@ -7983,7 +7983,7 @@
         <p:spPr>
           <a:xfrm>
             <a:off x="822960" y="1472184"/>
-            <a:ext cx="100584" cy="2615184"/>
+            <a:ext cx="100584" cy="1847088"/>
           </a:xfrm>
           <a:prstGeom prst="roundRect">
             <a:avLst/>
@@ -8064,7 +8064,7 @@
         <p:spPr>
           <a:xfrm>
             <a:off x="1097280" y="1856232"/>
-            <a:ext cx="10088575" cy="1920240"/>
+            <a:ext cx="10088575" cy="1152144"/>
           </a:xfrm>
           <a:prstGeom prst="rect">
             <a:avLst/>
@@ -8091,7 +8091,7 @@
                 <a:ea typeface="Leelawadee UI"/>
                 <a:cs typeface="Leelawadee UI"/>
               </a:rPr>
-              <a:t>อ่าน fixit-spec.md แล้วสร้าง sub-agent ให้ผม 3 ตัว</a:t>
+              <a:t>อ่าน fixit-spec.md แล้วเสนอว่าควรแบ่งงานให้ผู้ช่วยกี่ตัว</a:t>
             </a:r>
           </a:p>
           <a:p>
@@ -8109,7 +8109,7 @@
                 <a:ea typeface="Leelawadee UI"/>
                 <a:cs typeface="Leelawadee UI"/>
               </a:rPr>
-              <a:t>1 builder-ui สร้างหน้าจอทุกหน้า ใช้โมเดล haiku</a:t>
+              <a:t>แต่ละตัวทำอะไร และควรใช้โมเดลไหนเพื่อไม่ให้เปลืองโทเคน</a:t>
             </a:r>
           </a:p>
           <a:p>
@@ -8127,17 +8127,36 @@
                 <a:ea typeface="Leelawadee UI"/>
                 <a:cs typeface="Leelawadee UI"/>
               </a:rPr>
-              <a:t>2 builder-data ต่อ Firestore ทำ CRUD และล็อกอิน ใช้โมเดล sonnet</a:t>
-            </a:r>
-          </a:p>
-          <a:p>
-            <a:pPr algn="l">
-              <a:spcAft>
-                <a:spcPts val="0"/>
-              </a:spcAft>
-            </a:pPr>
-            <a:r>
-              <a:rPr sz="2000" b="0">
+              <a:t>ขอดูแผนก่อน อย่าเพิ่งสร้าง</a:t>
+            </a:r>
+          </a:p>
+        </p:txBody>
+      </p:sp>
+      <p:sp>
+        <p:nvSpPr>
+          <p:cNvPr id="7" name="TextBox 6"/>
+          <p:cNvSpPr txBox="1"/>
+          <p:nvPr/>
+        </p:nvSpPr>
+        <p:spPr>
+          <a:xfrm>
+            <a:off x="822960" y="3520440"/>
+            <a:ext cx="10545775" cy="560324"/>
+          </a:xfrm>
+          <a:prstGeom prst="rect">
+            <a:avLst/>
+          </a:prstGeom>
+          <a:noFill/>
+        </p:spPr>
+        <p:txBody>
+          <a:bodyPr wrap="square">
+            <a:spAutoFit/>
+          </a:bodyPr>
+          <a:lstStyle/>
+          <a:p>
+            <a:pPr algn="l"/>
+            <a:r>
+              <a:rPr sz="2600" b="0">
                 <a:solidFill>
                   <a:srgbClr val="1A1A1A"/>
                 </a:solidFill>
@@ -8145,17 +8164,36 @@
                 <a:ea typeface="Leelawadee UI"/>
                 <a:cs typeface="Leelawadee UI"/>
               </a:rPr>
-              <a:t>3 builder-ai ทำปุ่มผู้ช่วย AI ใช้โมเดล sonnet</a:t>
-            </a:r>
-          </a:p>
-          <a:p>
-            <a:pPr algn="l">
-              <a:spcAft>
-                <a:spcPts val="0"/>
-              </a:spcAft>
-            </a:pPr>
-            <a:r>
-              <a:rPr sz="2000" b="0">
+              <a:t>• เราไม่ต้องบอกว่ากี่ตัว ไม่ต้องบอกชื่อโมเดล</a:t>
+            </a:r>
+          </a:p>
+        </p:txBody>
+      </p:sp>
+      <p:sp>
+        <p:nvSpPr>
+          <p:cNvPr id="8" name="TextBox 7"/>
+          <p:cNvSpPr txBox="1"/>
+          <p:nvPr/>
+        </p:nvSpPr>
+        <p:spPr>
+          <a:xfrm>
+            <a:off x="822960" y="4135628"/>
+            <a:ext cx="10545775" cy="1029208"/>
+          </a:xfrm>
+          <a:prstGeom prst="rect">
+            <a:avLst/>
+          </a:prstGeom>
+          <a:noFill/>
+        </p:spPr>
+        <p:txBody>
+          <a:bodyPr wrap="square">
+            <a:spAutoFit/>
+          </a:bodyPr>
+          <a:lstStyle/>
+          <a:p>
+            <a:pPr algn="l"/>
+            <a:r>
+              <a:rPr sz="2600" b="0">
                 <a:solidFill>
                   <a:srgbClr val="1A1A1A"/>
                 </a:solidFill>
@@ -8163,14 +8201,14 @@
                 <a:ea typeface="Leelawadee UI"/>
                 <a:cs typeface="Leelawadee UI"/>
               </a:rPr>
-              <a:t>ทุกตัวห้ามทำงานนอกสเปค เสร็จแล้วให้ผมอ่านไฟล์ก่อน</a:t>
-            </a:r>
-          </a:p>
-        </p:txBody>
-      </p:sp>
-      <p:sp>
-        <p:nvSpPr>
-          <p:cNvPr id="7" name="TextBox 6"/>
+              <a:t>• หน้าที่ของเราคืออ่านแผนที่มันเสนอ แล้วบอกว่าอะไรไม่ใช่</a:t>
+            </a:r>
+          </a:p>
+        </p:txBody>
+      </p:sp>
+      <p:sp>
+        <p:nvSpPr>
+          <p:cNvPr id="9" name="TextBox 8"/>
           <p:cNvSpPr txBox="1"/>
           <p:nvPr/>
         </p:nvSpPr>
@@ -8254,96 +8292,82 @@
                 <a:ea typeface="Leelawadee UI"/>
                 <a:cs typeface="Leelawadee UI"/>
               </a:rPr>
-              <a:t>💬 แล้วค่อยสั่งทีเดียวจบ</a:t>
-            </a:r>
-          </a:p>
-        </p:txBody>
-      </p:sp>
-      <p:sp>
-        <p:nvSpPr>
-          <p:cNvPr id="3" name="Rounded Rectangle 2"/>
-          <p:cNvSpPr/>
+              <a:t>⭐ อ่านแผนที่มันเสนอ แล้วตรวจ 3 ข้อ</a:t>
+            </a:r>
+          </a:p>
+        </p:txBody>
+      </p:sp>
+      <p:sp>
+        <p:nvSpPr>
+          <p:cNvPr id="3" name="TextBox 2"/>
+          <p:cNvSpPr txBox="1"/>
           <p:nvPr/>
         </p:nvSpPr>
         <p:spPr>
           <a:xfrm>
             <a:off x="822960" y="1472184"/>
-            <a:ext cx="10545775" cy="1847088"/>
-          </a:xfrm>
-          <a:prstGeom prst="roundRect">
-            <a:avLst/>
-          </a:prstGeom>
-          <a:solidFill>
-            <a:srgbClr val="FFF7E6"/>
-          </a:solidFill>
-          <a:ln w="22225">
-            <a:solidFill>
-              <a:srgbClr val="E0A02C"/>
-            </a:solidFill>
-          </a:ln>
-          <a:effectLst/>
-        </p:spPr>
-        <p:style>
-          <a:lnRef idx="1">
-            <a:schemeClr val="accent1"/>
-          </a:lnRef>
-          <a:fillRef idx="3">
-            <a:schemeClr val="accent1"/>
-          </a:fillRef>
-          <a:effectRef idx="2">
-            <a:schemeClr val="accent1"/>
-          </a:effectRef>
-          <a:fontRef idx="minor">
-            <a:schemeClr val="lt1"/>
-          </a:fontRef>
-        </p:style>
-        <p:txBody>
-          <a:bodyPr rtlCol="0" anchor="ctr"/>
-          <a:lstStyle/>
-          <a:p/>
-        </p:txBody>
-      </p:sp>
-      <p:sp>
-        <p:nvSpPr>
-          <p:cNvPr id="4" name="Rounded Rectangle 3"/>
-          <p:cNvSpPr/>
-          <p:nvPr/>
-        </p:nvSpPr>
-        <p:spPr>
-          <a:xfrm>
-            <a:off x="822960" y="1472184"/>
-            <a:ext cx="100584" cy="1847088"/>
-          </a:xfrm>
-          <a:prstGeom prst="roundRect">
-            <a:avLst/>
-          </a:prstGeom>
-          <a:solidFill>
-            <a:srgbClr val="E0A02C"/>
-          </a:solidFill>
-          <a:ln>
-            <a:noFill/>
-          </a:ln>
-          <a:effectLst/>
-        </p:spPr>
-        <p:style>
-          <a:lnRef idx="1">
-            <a:schemeClr val="accent1"/>
-          </a:lnRef>
-          <a:fillRef idx="3">
-            <a:schemeClr val="accent1"/>
-          </a:fillRef>
-          <a:effectRef idx="2">
-            <a:schemeClr val="accent1"/>
-          </a:effectRef>
-          <a:fontRef idx="minor">
-            <a:schemeClr val="lt1"/>
-          </a:fontRef>
-        </p:style>
-        <p:txBody>
-          <a:bodyPr rtlCol="0" anchor="ctr"/>
-          <a:lstStyle/>
-          <a:p>
-            <a:pPr algn="ctr"/>
+            <a:ext cx="10545775" cy="560324"/>
+          </a:xfrm>
+          <a:prstGeom prst="rect">
+            <a:avLst/>
+          </a:prstGeom>
+          <a:noFill/>
+        </p:spPr>
+        <p:txBody>
+          <a:bodyPr wrap="square">
+            <a:spAutoFit/>
+          </a:bodyPr>
+          <a:lstStyle/>
+          <a:p>
+            <a:pPr algn="l"/>
+            <a:r>
+              <a:rPr sz="2600" b="0">
+                <a:solidFill>
+                  <a:srgbClr val="1A1A1A"/>
+                </a:solidFill>
+                <a:latin typeface="Leelawadee UI"/>
+                <a:ea typeface="Leelawadee UI"/>
+                <a:cs typeface="Leelawadee UI"/>
+              </a:rPr>
+              <a:t>• งานครบทั้ง หน้าจอ · ข้อมูล+ล็อกอิน · ปุ่ม AI ไหม</a:t>
+            </a:r>
+          </a:p>
+        </p:txBody>
+      </p:sp>
+      <p:sp>
+        <p:nvSpPr>
+          <p:cNvPr id="4" name="TextBox 3"/>
+          <p:cNvSpPr txBox="1"/>
+          <p:nvPr/>
+        </p:nvSpPr>
+        <p:spPr>
+          <a:xfrm>
+            <a:off x="822960" y="2087372"/>
+            <a:ext cx="10545775" cy="1029208"/>
+          </a:xfrm>
+          <a:prstGeom prst="rect">
+            <a:avLst/>
+          </a:prstGeom>
+          <a:noFill/>
+        </p:spPr>
+        <p:txBody>
+          <a:bodyPr wrap="square">
+            <a:spAutoFit/>
+          </a:bodyPr>
+          <a:lstStyle/>
+          <a:p>
+            <a:pPr algn="l"/>
+            <a:r>
+              <a:rPr sz="2600" b="0">
+                <a:solidFill>
+                  <a:srgbClr val="1A1A1A"/>
+                </a:solidFill>
+                <a:latin typeface="Leelawadee UI"/>
+                <a:ea typeface="Leelawadee UI"/>
+                <a:cs typeface="Leelawadee UI"/>
+              </a:rPr>
+              <a:t>• งานทำตามแบบใช้โมเดลเล็กหรือยัง ถ้าให้ตัวใหญ่หมด สั่งแก้</a:t>
+            </a:r>
           </a:p>
         </p:txBody>
       </p:sp>
@@ -8355,8 +8379,8 @@
         </p:nvSpPr>
         <p:spPr>
           <a:xfrm>
-            <a:off x="1097280" y="1527048"/>
-            <a:ext cx="10088575" cy="310896"/>
+            <a:off x="822960" y="3171444"/>
+            <a:ext cx="10545775" cy="560324"/>
           </a:xfrm>
           <a:prstGeom prst="rect">
             <a:avLst/>
@@ -8371,15 +8395,15 @@
           <a:p>
             <a:pPr algn="l"/>
             <a:r>
-              <a:rPr sz="1400" b="1">
-                <a:solidFill>
-                  <a:srgbClr val="A86C0A"/>
-                </a:solidFill>
-                <a:latin typeface="Leelawadee UI"/>
-                <a:ea typeface="Leelawadee UI"/>
-                <a:cs typeface="Leelawadee UI"/>
-              </a:rPr>
-              <a:t>💬 พิมพ์แบบนี้</a:t>
+              <a:rPr sz="2600" b="0">
+                <a:solidFill>
+                  <a:srgbClr val="1A1A1A"/>
+                </a:solidFill>
+                <a:latin typeface="Leelawadee UI"/>
+                <a:ea typeface="Leelawadee UI"/>
+                <a:cs typeface="Leelawadee UI"/>
+              </a:rPr>
+              <a:t>• มีบรรทัด ห้ามทำงานนอกสเปค ไหม</a:t>
             </a:r>
           </a:p>
         </p:txBody>
@@ -8387,83 +8411,6 @@
       <p:sp>
         <p:nvSpPr>
           <p:cNvPr id="6" name="TextBox 5"/>
-          <p:cNvSpPr txBox="1"/>
-          <p:nvPr/>
-        </p:nvSpPr>
-        <p:spPr>
-          <a:xfrm>
-            <a:off x="1097280" y="1856232"/>
-            <a:ext cx="10088575" cy="1152144"/>
-          </a:xfrm>
-          <a:prstGeom prst="rect">
-            <a:avLst/>
-          </a:prstGeom>
-          <a:noFill/>
-        </p:spPr>
-        <p:txBody>
-          <a:bodyPr wrap="square">
-            <a:spAutoFit/>
-          </a:bodyPr>
-          <a:lstStyle/>
-          <a:p>
-            <a:pPr algn="l">
-              <a:spcAft>
-                <a:spcPts val="0"/>
-              </a:spcAft>
-            </a:pPr>
-            <a:r>
-              <a:rPr sz="2000" b="0">
-                <a:solidFill>
-                  <a:srgbClr val="1A1A1A"/>
-                </a:solidFill>
-                <a:latin typeface="Leelawadee UI"/>
-                <a:ea typeface="Leelawadee UI"/>
-                <a:cs typeface="Leelawadee UI"/>
-              </a:rPr>
-              <a:t>ให้ผู้ช่วยทั้ง 3 ตัวสร้างระบบตาม fixit-spec.md ให้ครบ</a:t>
-            </a:r>
-          </a:p>
-          <a:p>
-            <a:pPr algn="l">
-              <a:spcAft>
-                <a:spcPts val="0"/>
-              </a:spcAft>
-            </a:pPr>
-            <a:r>
-              <a:rPr sz="2000" b="0">
-                <a:solidFill>
-                  <a:srgbClr val="1A1A1A"/>
-                </a:solidFill>
-                <a:latin typeface="Leelawadee UI"/>
-                <a:ea typeface="Leelawadee UI"/>
-                <a:cs typeface="Leelawadee UI"/>
-              </a:rPr>
-              <a:t>แบ่งงานกันตามหน้าที่ของแต่ละตัว</a:t>
-            </a:r>
-          </a:p>
-          <a:p>
-            <a:pPr algn="l">
-              <a:spcAft>
-                <a:spcPts val="0"/>
-              </a:spcAft>
-            </a:pPr>
-            <a:r>
-              <a:rPr sz="2000" b="0">
-                <a:solidFill>
-                  <a:srgbClr val="1A1A1A"/>
-                </a:solidFill>
-                <a:latin typeface="Leelawadee UI"/>
-                <a:ea typeface="Leelawadee UI"/>
-                <a:cs typeface="Leelawadee UI"/>
-              </a:rPr>
-              <a:t>เสร็จแต่ละส่วนให้รายงานผมทีละตัว</a:t>
-            </a:r>
-          </a:p>
-        </p:txBody>
-      </p:sp>
-      <p:sp>
-        <p:nvSpPr>
-          <p:cNvPr id="7" name="TextBox 6"/>
           <p:cNvSpPr txBox="1"/>
           <p:nvPr/>
         </p:nvSpPr>
@@ -8707,7 +8654,7 @@
                 <a:ea typeface="Leelawadee UI"/>
                 <a:cs typeface="Leelawadee UI"/>
               </a:rPr>
-              <a:t>• ตั้งผู้ช่วย 3 ตัว แล้วเปิดไฟล์อ่านก่อน</a:t>
+              <a:t>• ถามว่าควรมีผู้ช่วยกี่ตัว แล้วอ่านแผนที่มันเสนอ</a:t>
             </a:r>
           </a:p>
         </p:txBody>
@@ -8758,7 +8705,7 @@
         <p:spPr>
           <a:xfrm>
             <a:off x="822960" y="3306064"/>
-            <a:ext cx="10545775" cy="1029208"/>
+            <a:ext cx="10545775" cy="560324"/>
           </a:xfrm>
           <a:prstGeom prst="rect">
             <a:avLst/>
@@ -8781,7 +8728,7 @@
                 <a:ea typeface="Leelawadee UI"/>
                 <a:cs typeface="Leelawadee UI"/>
               </a:rPr>
-              <a:t>• 👀 จุดที่ต้องดูให้ทัน: ชื่อโมเดลของแต่ละตัว และผลที่ได้กลับมา</a:t>
+              <a:t>• 👀 จุดที่ต้องดูให้ทัน: โมเดลที่มันเลือกให้แต่ละตัว</a:t>
             </a:r>
           </a:p>
         </p:txBody>

--- a/materials/week9/w9-slides.pptx
+++ b/materials/week9/w9-slides.pptx
@@ -1460,7 +1460,7 @@
           <a:lstStyle/>
           <a:p>
             <a:r>
-              <a:t>พูดว่า "เดี๋ยวจะได้เห็นเบราว์เซอร์เปิดขึ้นมาเองแล้วกดปุ่มเองสด ๆ ตรงนี้แหละที่ห้องมักจะฮือฮา" · บอกว่าเราสั่งเป็นภาษาไทย ไม่ต้องเขียนโค้ดเทสต์เอง · เสริมเรื่อง MCP ก่อน: ปกติ AI พิมพ์ข้อความและแก้ไฟล์ได้เท่านั้น · MCP คือช่องทางให้มันหยิบเครื่องมือภายนอกมาใช้ เปรียบเหมือนต่อมือให้ AI · เส้นทางคือ เราสั่งภาษาไทย → Claude → ผ่าน MCP → Playwright → เบราว์เซอร์จริง แล้วส่งผลผ่าน/ไม่ผ่านกลับมา</a:t>
+              <a:t>พูดว่า "เดี๋ยวจะได้เห็นเบราว์เซอร์เปิดขึ้นมาเองแล้วกดปุ่มเองสด ๆ ตรงนี้แหละที่ห้องมักจะฮือฮา" · เผื่อไว้: ถ้าจอเงียบไม่มีหน้าต่างเด้ง แปลว่ามันรันแบบไม่แสดงหน้าจอ (headless) ให้สั่งว่า "ขอให้เปิดเบราว์เซอร์แบบเห็นหน้าจอด้วย" แล้วรันใหม่ · บอกว่าเราสั่งเป็นภาษาไทย ไม่ต้องเขียนโค้ดเทสต์เอง · เสริมเรื่อง MCP ก่อน: ปกติ AI พิมพ์ข้อความและแก้ไฟล์ได้เท่านั้น · MCP คือช่องทางให้มันหยิบเครื่องมือภายนอกมาใช้ เปรียบเหมือนต่อมือให้ AI · เส้นทางคือ เราสั่งภาษาไทย → Claude → ผ่าน MCP → Playwright → เบราว์เซอร์จริง แล้วส่งผลผ่าน/ไม่ผ่านกลับมา</a:t>
             </a:r>
           </a:p>
         </p:txBody>
